--- a/crates/quarto-core/tests/fixtures/pandoc-recordings/recordings/crossrefs-pptx/capture/all-docx.pptx
+++ b/crates/quarto-core/tests/fixtures/pandoc-recordings/recordings/crossrefs-pptx/capture/all-docx.pptx
@@ -1,6 +1,6 @@
 
 <file path=ppt/presentation.xml><?xml version="1.0" encoding="utf-8"?>
-<p:presentation xmlns:a="http://schemas.openxmlformats.org/drawingml/2006/main" xmlns:p="http://schemas.openxmlformats.org/presentationml/2006/main" xmlns:r="http://schemas.openxmlformats.org/officeDocument/2006/relationships" autoCompressPictures="0" saveSubsetFonts="1">
+<p:presentation xmlns:a="http://schemas.openxmlformats.org/drawingml/2006/main" xmlns:r="http://schemas.openxmlformats.org/officeDocument/2006/relationships" xmlns:p="http://schemas.openxmlformats.org/presentationml/2006/main" saveSubsetFonts="1" autoCompressPictures="0">
   <p:sldMasterIdLst>
     <p:sldMasterId id="2147483648" r:id="rId1"/>
   </p:sldMasterIdLst>
@@ -17,8 +17,8 @@
     <a:defPPr>
       <a:defRPr lang="en-US"/>
     </a:defPPr>
-    <a:lvl1pPr algn="l" defTabSz="457200" eaLnBrk="1" hangingPunct="1" latinLnBrk="0" marL="0" rtl="0">
-      <a:defRPr kern="1200" sz="1800">
+    <a:lvl1pPr marL="0" algn="l" defTabSz="457200" rtl="0" eaLnBrk="1" latinLnBrk="0" hangingPunct="1">
+      <a:defRPr sz="1800" kern="1200">
         <a:solidFill>
           <a:schemeClr val="tx1"/>
         </a:solidFill>
@@ -27,8 +27,8 @@
         <a:cs typeface="+mn-cs"/>
       </a:defRPr>
     </a:lvl1pPr>
-    <a:lvl2pPr algn="l" defTabSz="457200" eaLnBrk="1" hangingPunct="1" latinLnBrk="0" marL="457200" rtl="0">
-      <a:defRPr kern="1200" sz="1800">
+    <a:lvl2pPr marL="457200" algn="l" defTabSz="457200" rtl="0" eaLnBrk="1" latinLnBrk="0" hangingPunct="1">
+      <a:defRPr sz="1800" kern="1200">
         <a:solidFill>
           <a:schemeClr val="tx1"/>
         </a:solidFill>
@@ -37,8 +37,8 @@
         <a:cs typeface="+mn-cs"/>
       </a:defRPr>
     </a:lvl2pPr>
-    <a:lvl3pPr algn="l" defTabSz="457200" eaLnBrk="1" hangingPunct="1" latinLnBrk="0" marL="914400" rtl="0">
-      <a:defRPr kern="1200" sz="1800">
+    <a:lvl3pPr marL="914400" algn="l" defTabSz="457200" rtl="0" eaLnBrk="1" latinLnBrk="0" hangingPunct="1">
+      <a:defRPr sz="1800" kern="1200">
         <a:solidFill>
           <a:schemeClr val="tx1"/>
         </a:solidFill>
@@ -47,8 +47,8 @@
         <a:cs typeface="+mn-cs"/>
       </a:defRPr>
     </a:lvl3pPr>
-    <a:lvl4pPr algn="l" defTabSz="457200" eaLnBrk="1" hangingPunct="1" latinLnBrk="0" marL="1371600" rtl="0">
-      <a:defRPr kern="1200" sz="1800">
+    <a:lvl4pPr marL="1371600" algn="l" defTabSz="457200" rtl="0" eaLnBrk="1" latinLnBrk="0" hangingPunct="1">
+      <a:defRPr sz="1800" kern="1200">
         <a:solidFill>
           <a:schemeClr val="tx1"/>
         </a:solidFill>
@@ -57,8 +57,8 @@
         <a:cs typeface="+mn-cs"/>
       </a:defRPr>
     </a:lvl4pPr>
-    <a:lvl5pPr algn="l" defTabSz="457200" eaLnBrk="1" hangingPunct="1" latinLnBrk="0" marL="1828800" rtl="0">
-      <a:defRPr kern="1200" sz="1800">
+    <a:lvl5pPr marL="1828800" algn="l" defTabSz="457200" rtl="0" eaLnBrk="1" latinLnBrk="0" hangingPunct="1">
+      <a:defRPr sz="1800" kern="1200">
         <a:solidFill>
           <a:schemeClr val="tx1"/>
         </a:solidFill>
@@ -67,8 +67,8 @@
         <a:cs typeface="+mn-cs"/>
       </a:defRPr>
     </a:lvl5pPr>
-    <a:lvl6pPr algn="l" defTabSz="457200" eaLnBrk="1" hangingPunct="1" latinLnBrk="0" marL="2286000" rtl="0">
-      <a:defRPr kern="1200" sz="1800">
+    <a:lvl6pPr marL="2286000" algn="l" defTabSz="457200" rtl="0" eaLnBrk="1" latinLnBrk="0" hangingPunct="1">
+      <a:defRPr sz="1800" kern="1200">
         <a:solidFill>
           <a:schemeClr val="tx1"/>
         </a:solidFill>
@@ -77,8 +77,8 @@
         <a:cs typeface="+mn-cs"/>
       </a:defRPr>
     </a:lvl6pPr>
-    <a:lvl7pPr algn="l" defTabSz="457200" eaLnBrk="1" hangingPunct="1" latinLnBrk="0" marL="2743200" rtl="0">
-      <a:defRPr kern="1200" sz="1800">
+    <a:lvl7pPr marL="2743200" algn="l" defTabSz="457200" rtl="0" eaLnBrk="1" latinLnBrk="0" hangingPunct="1">
+      <a:defRPr sz="1800" kern="1200">
         <a:solidFill>
           <a:schemeClr val="tx1"/>
         </a:solidFill>
@@ -87,8 +87,8 @@
         <a:cs typeface="+mn-cs"/>
       </a:defRPr>
     </a:lvl7pPr>
-    <a:lvl8pPr algn="l" defTabSz="457200" eaLnBrk="1" hangingPunct="1" latinLnBrk="0" marL="3200400" rtl="0">
-      <a:defRPr kern="1200" sz="1800">
+    <a:lvl8pPr marL="3200400" algn="l" defTabSz="457200" rtl="0" eaLnBrk="1" latinLnBrk="0" hangingPunct="1">
+      <a:defRPr sz="1800" kern="1200">
         <a:solidFill>
           <a:schemeClr val="tx1"/>
         </a:solidFill>
@@ -97,8 +97,8 @@
         <a:cs typeface="+mn-cs"/>
       </a:defRPr>
     </a:lvl8pPr>
-    <a:lvl9pPr algn="l" defTabSz="457200" eaLnBrk="1" hangingPunct="1" latinLnBrk="0" marL="3657600" rtl="0">
-      <a:defRPr kern="1200" sz="1800">
+    <a:lvl9pPr marL="3657600" algn="l" defTabSz="457200" rtl="0" eaLnBrk="1" latinLnBrk="0" hangingPunct="1">
+      <a:defRPr sz="1800" kern="1200">
         <a:solidFill>
           <a:schemeClr val="tx1"/>
         </a:solidFill>
@@ -2570,7 +2570,7 @@
 </file>
 
 <file path=ppt/slideMasters/slideMaster1.xml><?xml version="1.0" encoding="utf-8"?>
-<p:sldMaster xmlns:a="http://schemas.openxmlformats.org/drawingml/2006/main" xmlns:p="http://schemas.openxmlformats.org/presentationml/2006/main" xmlns:r="http://schemas.openxmlformats.org/officeDocument/2006/relationships">
+<p:sldMaster xmlns:a="http://schemas.openxmlformats.org/drawingml/2006/main" xmlns:r="http://schemas.openxmlformats.org/officeDocument/2006/relationships" xmlns:p="http://schemas.openxmlformats.org/presentationml/2006/main">
   <p:cSld>
     <p:bg>
       <p:bgRef idx="1001">
@@ -2611,7 +2611,7 @@
           </a:prstGeom>
         </p:spPr>
         <p:txBody>
-          <a:bodyPr anchor="ctr" bIns="45720" lIns="91440" rIns="91440" rtlCol="0" tIns="45720" vert="horz">
+          <a:bodyPr vert="horz" lIns="91440" tIns="45720" rIns="91440" bIns="45720" rtlCol="0" anchor="ctr">
             <a:normAutofit/>
           </a:bodyPr>
           <a:lstStyle/>
@@ -2630,7 +2630,7 @@
             <a:spLocks noGrp="1"/>
           </p:cNvSpPr>
           <p:nvPr>
-            <p:ph idx="1" type="body"/>
+            <p:ph type="body" idx="1"/>
           </p:nvPr>
         </p:nvSpPr>
         <p:spPr>
@@ -2643,7 +2643,7 @@
           </a:prstGeom>
         </p:spPr>
         <p:txBody>
-          <a:bodyPr bIns="45720" lIns="91440" rIns="91440" rtlCol="0" tIns="45720" vert="horz">
+          <a:bodyPr vert="horz" lIns="91440" tIns="45720" rIns="91440" bIns="45720" rtlCol="0">
             <a:normAutofit/>
           </a:bodyPr>
           <a:lstStyle/>
@@ -2691,7 +2691,7 @@
             <a:spLocks noGrp="1"/>
           </p:cNvSpPr>
           <p:nvPr>
-            <p:ph idx="2" sz="half" type="dt"/>
+            <p:ph type="dt" sz="half" idx="2"/>
           </p:nvPr>
         </p:nvSpPr>
         <p:spPr>
@@ -2704,7 +2704,7 @@
           </a:prstGeom>
         </p:spPr>
         <p:txBody>
-          <a:bodyPr anchor="ctr" bIns="45720" lIns="91440" rIns="91440" rtlCol="0" tIns="45720" vert="horz"/>
+          <a:bodyPr vert="horz" lIns="91440" tIns="45720" rIns="91440" bIns="45720" rtlCol="0" anchor="ctr"/>
           <a:lstStyle>
             <a:lvl1pPr algn="l">
               <a:defRPr sz="900">
@@ -2732,7 +2732,7 @@
             <a:spLocks noGrp="1"/>
           </p:cNvSpPr>
           <p:nvPr>
-            <p:ph idx="3" sz="quarter" type="ftr"/>
+            <p:ph type="ftr" sz="quarter" idx="3"/>
           </p:nvPr>
         </p:nvSpPr>
         <p:spPr>
@@ -2745,7 +2745,7 @@
           </a:prstGeom>
         </p:spPr>
         <p:txBody>
-          <a:bodyPr anchor="ctr" bIns="45720" lIns="91440" rIns="91440" rtlCol="0" tIns="45720" vert="horz"/>
+          <a:bodyPr vert="horz" lIns="91440" tIns="45720" rIns="91440" bIns="45720" rtlCol="0" anchor="ctr"/>
           <a:lstStyle>
             <a:lvl1pPr algn="ctr">
               <a:defRPr sz="900">
@@ -2769,7 +2769,7 @@
             <a:spLocks noGrp="1"/>
           </p:cNvSpPr>
           <p:nvPr>
-            <p:ph idx="4" sz="quarter" type="sldNum"/>
+            <p:ph type="sldNum" sz="quarter" idx="4"/>
           </p:nvPr>
         </p:nvSpPr>
         <p:spPr>
@@ -2782,7 +2782,7 @@
           </a:prstGeom>
         </p:spPr>
         <p:txBody>
-          <a:bodyPr anchor="ctr" bIns="45720" lIns="91440" rIns="91440" rtlCol="0" tIns="45720" vert="horz"/>
+          <a:bodyPr vert="horz" lIns="91440" tIns="45720" rIns="91440" bIns="45720" rtlCol="0" anchor="ctr"/>
           <a:lstStyle>
             <a:lvl1pPr algn="r">
               <a:defRPr sz="900">
@@ -2810,7 +2810,7 @@
       </p:ext>
     </p:extLst>
   </p:cSld>
-  <p:clrMap accent1="accent1" accent2="accent2" accent3="accent3" accent4="accent4" accent5="accent5" accent6="accent6" bg1="lt1" bg2="lt2" folHlink="folHlink" hlink="hlink" tx1="dk1" tx2="dk2"/>
+  <p:clrMap bg1="lt1" tx1="dk1" bg2="lt2" tx2="dk2" accent1="accent1" accent2="accent2" accent3="accent3" accent4="accent4" accent5="accent5" accent6="accent6" hlink="hlink" folHlink="folHlink"/>
   <p:sldLayoutIdLst>
     <p:sldLayoutId id="2147483649" r:id="rId1"/>
     <p:sldLayoutId id="2147483650" r:id="rId2"/>
@@ -2826,12 +2826,12 @@
   </p:sldLayoutIdLst>
   <p:txStyles>
     <p:titleStyle>
-      <a:lvl1pPr algn="ctr" defTabSz="342900" eaLnBrk="1" hangingPunct="1" latinLnBrk="0" rtl="0">
+      <a:lvl1pPr algn="ctr" defTabSz="342900" rtl="0" eaLnBrk="1" latinLnBrk="0" hangingPunct="1">
         <a:spcBef>
           <a:spcPct val="0"/>
         </a:spcBef>
         <a:buNone/>
-        <a:defRPr kern="1200" sz="3300">
+        <a:defRPr sz="3300" kern="1200">
           <a:solidFill>
             <a:schemeClr val="tx1"/>
           </a:solidFill>
@@ -2842,13 +2842,13 @@
       </a:lvl1pPr>
     </p:titleStyle>
     <p:bodyStyle>
-      <a:lvl1pPr algn="l" defTabSz="342900" eaLnBrk="1" hangingPunct="1" indent="-342900" latinLnBrk="0" marL="342900" rtl="0">
+      <a:lvl1pPr marL="342900" indent="-342900" algn="l" defTabSz="342900" rtl="0" eaLnBrk="1" latinLnBrk="0" hangingPunct="1">
         <a:spcBef>
           <a:spcPct val="20000"/>
         </a:spcBef>
         <a:buFont typeface="Arial"/>
         <a:buChar char="•"/>
-        <a:defRPr kern="1200" sz="2400">
+        <a:defRPr sz="2400" kern="1200">
           <a:solidFill>
             <a:schemeClr val="tx1"/>
           </a:solidFill>
@@ -2857,13 +2857,13 @@
           <a:cs typeface="+mn-cs"/>
         </a:defRPr>
       </a:lvl1pPr>
-      <a:lvl2pPr algn="l" defTabSz="342900" eaLnBrk="1" hangingPunct="1" indent="-342900" latinLnBrk="0" marL="685800" rtl="0">
+      <a:lvl2pPr marL="685800" indent="-342900" algn="l" defTabSz="342900" rtl="0" eaLnBrk="1" latinLnBrk="0" hangingPunct="1">
         <a:spcBef>
           <a:spcPct val="20000"/>
         </a:spcBef>
         <a:buFont typeface="Arial"/>
         <a:buChar char="–"/>
-        <a:defRPr kern="1200" sz="2100">
+        <a:defRPr sz="2100" kern="1200">
           <a:solidFill>
             <a:schemeClr val="tx1"/>
           </a:solidFill>
@@ -2872,13 +2872,13 @@
           <a:cs typeface="+mn-cs"/>
         </a:defRPr>
       </a:lvl2pPr>
-      <a:lvl3pPr algn="l" defTabSz="342900" eaLnBrk="1" hangingPunct="1" indent="-342900" latinLnBrk="0" marL="1028700" rtl="0">
+      <a:lvl3pPr marL="1028700" indent="-342900" algn="l" defTabSz="342900" rtl="0" eaLnBrk="1" latinLnBrk="0" hangingPunct="1">
         <a:spcBef>
           <a:spcPct val="20000"/>
         </a:spcBef>
         <a:buFont typeface="Arial"/>
         <a:buChar char="•"/>
-        <a:defRPr kern="1200" sz="1800">
+        <a:defRPr sz="1800" kern="1200">
           <a:solidFill>
             <a:schemeClr val="tx1"/>
           </a:solidFill>
@@ -2887,13 +2887,13 @@
           <a:cs typeface="+mn-cs"/>
         </a:defRPr>
       </a:lvl3pPr>
-      <a:lvl4pPr algn="l" defTabSz="342900" eaLnBrk="1" hangingPunct="1" indent="-342900" latinLnBrk="0" marL="1371600" rtl="0">
+      <a:lvl4pPr marL="1371600" indent="-342900" algn="l" defTabSz="342900" rtl="0" eaLnBrk="1" latinLnBrk="0" hangingPunct="1">
         <a:spcBef>
           <a:spcPct val="20000"/>
         </a:spcBef>
         <a:buFont typeface="Arial"/>
         <a:buChar char="–"/>
-        <a:defRPr kern="1200" sz="1500">
+        <a:defRPr sz="1500" kern="1200">
           <a:solidFill>
             <a:schemeClr val="tx1"/>
           </a:solidFill>
@@ -2902,13 +2902,13 @@
           <a:cs typeface="+mn-cs"/>
         </a:defRPr>
       </a:lvl4pPr>
-      <a:lvl5pPr algn="l" defTabSz="342900" eaLnBrk="1" hangingPunct="1" indent="-342900" latinLnBrk="0" marL="1714500" rtl="0">
+      <a:lvl5pPr marL="1714500" indent="-342900" algn="l" defTabSz="342900" rtl="0" eaLnBrk="1" latinLnBrk="0" hangingPunct="1">
         <a:spcBef>
           <a:spcPct val="20000"/>
         </a:spcBef>
         <a:buFont typeface="Arial"/>
         <a:buChar char="»"/>
-        <a:defRPr kern="1200" sz="1500">
+        <a:defRPr sz="1500" kern="1200">
           <a:solidFill>
             <a:schemeClr val="tx1"/>
           </a:solidFill>
@@ -2917,13 +2917,13 @@
           <a:cs typeface="+mn-cs"/>
         </a:defRPr>
       </a:lvl5pPr>
-      <a:lvl6pPr algn="l" defTabSz="342900" eaLnBrk="1" hangingPunct="1" indent="-342900" latinLnBrk="0" marL="2057400" rtl="0">
+      <a:lvl6pPr marL="2057400" indent="-342900" algn="l" defTabSz="342900" rtl="0" eaLnBrk="1" latinLnBrk="0" hangingPunct="1">
         <a:spcBef>
           <a:spcPct val="20000"/>
         </a:spcBef>
         <a:buFont typeface="Arial"/>
         <a:buChar char="•"/>
-        <a:defRPr kern="1200" sz="1500">
+        <a:defRPr sz="1500" kern="1200">
           <a:solidFill>
             <a:schemeClr val="tx1"/>
           </a:solidFill>
@@ -2932,13 +2932,13 @@
           <a:cs typeface="+mn-cs"/>
         </a:defRPr>
       </a:lvl6pPr>
-      <a:lvl7pPr algn="l" defTabSz="342900" eaLnBrk="1" hangingPunct="1" indent="-342900" latinLnBrk="0" marL="2400300" rtl="0">
+      <a:lvl7pPr marL="2400300" indent="-342900" algn="l" defTabSz="342900" rtl="0" eaLnBrk="1" latinLnBrk="0" hangingPunct="1">
         <a:spcBef>
           <a:spcPct val="20000"/>
         </a:spcBef>
         <a:buFont typeface="Arial"/>
         <a:buChar char="•"/>
-        <a:defRPr kern="1200" sz="1500">
+        <a:defRPr sz="1500" kern="1200">
           <a:solidFill>
             <a:schemeClr val="tx1"/>
           </a:solidFill>
@@ -2947,13 +2947,13 @@
           <a:cs typeface="+mn-cs"/>
         </a:defRPr>
       </a:lvl7pPr>
-      <a:lvl8pPr algn="l" defTabSz="342900" eaLnBrk="1" hangingPunct="1" indent="-342900" latinLnBrk="0" marL="2743200" rtl="0">
+      <a:lvl8pPr marL="2743200" indent="-342900" algn="l" defTabSz="342900" rtl="0" eaLnBrk="1" latinLnBrk="0" hangingPunct="1">
         <a:spcBef>
           <a:spcPct val="20000"/>
         </a:spcBef>
         <a:buFont typeface="Arial"/>
         <a:buChar char="•"/>
-        <a:defRPr kern="1200" sz="1500">
+        <a:defRPr sz="1500" kern="1200">
           <a:solidFill>
             <a:schemeClr val="tx1"/>
           </a:solidFill>
@@ -2962,13 +2962,13 @@
           <a:cs typeface="+mn-cs"/>
         </a:defRPr>
       </a:lvl8pPr>
-      <a:lvl9pPr algn="l" defTabSz="342900" eaLnBrk="1" hangingPunct="1" indent="-342900" latinLnBrk="0" marL="3086100" rtl="0">
+      <a:lvl9pPr marL="3086100" indent="-342900" algn="l" defTabSz="342900" rtl="0" eaLnBrk="1" latinLnBrk="0" hangingPunct="1">
         <a:spcBef>
           <a:spcPct val="20000"/>
         </a:spcBef>
         <a:buFont typeface="Arial"/>
         <a:buChar char="•"/>
-        <a:defRPr kern="1200" sz="1500">
+        <a:defRPr sz="1500" kern="1200">
           <a:solidFill>
             <a:schemeClr val="tx1"/>
           </a:solidFill>
@@ -2982,8 +2982,8 @@
       <a:defPPr>
         <a:defRPr lang="en-US"/>
       </a:defPPr>
-      <a:lvl1pPr algn="l" defTabSz="342900" eaLnBrk="1" hangingPunct="1" latinLnBrk="0" marL="0" rtl="0">
-        <a:defRPr kern="1200" sz="1350">
+      <a:lvl1pPr marL="0" algn="l" defTabSz="342900" rtl="0" eaLnBrk="1" latinLnBrk="0" hangingPunct="1">
+        <a:defRPr sz="1350" kern="1200">
           <a:solidFill>
             <a:schemeClr val="tx1"/>
           </a:solidFill>
@@ -2992,8 +2992,8 @@
           <a:cs typeface="+mn-cs"/>
         </a:defRPr>
       </a:lvl1pPr>
-      <a:lvl2pPr algn="l" defTabSz="342900" eaLnBrk="1" hangingPunct="1" latinLnBrk="0" marL="342900" rtl="0">
-        <a:defRPr kern="1200" sz="1350">
+      <a:lvl2pPr marL="342900" algn="l" defTabSz="342900" rtl="0" eaLnBrk="1" latinLnBrk="0" hangingPunct="1">
+        <a:defRPr sz="1350" kern="1200">
           <a:solidFill>
             <a:schemeClr val="tx1"/>
           </a:solidFill>
@@ -3002,8 +3002,8 @@
           <a:cs typeface="+mn-cs"/>
         </a:defRPr>
       </a:lvl2pPr>
-      <a:lvl3pPr algn="l" defTabSz="342900" eaLnBrk="1" hangingPunct="1" latinLnBrk="0" marL="685800" rtl="0">
-        <a:defRPr kern="1200" sz="1350">
+      <a:lvl3pPr marL="685800" algn="l" defTabSz="342900" rtl="0" eaLnBrk="1" latinLnBrk="0" hangingPunct="1">
+        <a:defRPr sz="1350" kern="1200">
           <a:solidFill>
             <a:schemeClr val="tx1"/>
           </a:solidFill>
@@ -3012,8 +3012,8 @@
           <a:cs typeface="+mn-cs"/>
         </a:defRPr>
       </a:lvl3pPr>
-      <a:lvl4pPr algn="l" defTabSz="342900" eaLnBrk="1" hangingPunct="1" latinLnBrk="0" marL="1028700" rtl="0">
-        <a:defRPr kern="1200" sz="1350">
+      <a:lvl4pPr marL="1028700" algn="l" defTabSz="342900" rtl="0" eaLnBrk="1" latinLnBrk="0" hangingPunct="1">
+        <a:defRPr sz="1350" kern="1200">
           <a:solidFill>
             <a:schemeClr val="tx1"/>
           </a:solidFill>
@@ -3022,8 +3022,8 @@
           <a:cs typeface="+mn-cs"/>
         </a:defRPr>
       </a:lvl4pPr>
-      <a:lvl5pPr algn="l" defTabSz="342900" eaLnBrk="1" hangingPunct="1" latinLnBrk="0" marL="1371600" rtl="0">
-        <a:defRPr kern="1200" sz="1350">
+      <a:lvl5pPr marL="1371600" algn="l" defTabSz="342900" rtl="0" eaLnBrk="1" latinLnBrk="0" hangingPunct="1">
+        <a:defRPr sz="1350" kern="1200">
           <a:solidFill>
             <a:schemeClr val="tx1"/>
           </a:solidFill>
@@ -3032,8 +3032,8 @@
           <a:cs typeface="+mn-cs"/>
         </a:defRPr>
       </a:lvl5pPr>
-      <a:lvl6pPr algn="l" defTabSz="342900" eaLnBrk="1" hangingPunct="1" latinLnBrk="0" marL="1714500" rtl="0">
-        <a:defRPr kern="1200" sz="1350">
+      <a:lvl6pPr marL="1714500" algn="l" defTabSz="342900" rtl="0" eaLnBrk="1" latinLnBrk="0" hangingPunct="1">
+        <a:defRPr sz="1350" kern="1200">
           <a:solidFill>
             <a:schemeClr val="tx1"/>
           </a:solidFill>
@@ -3042,8 +3042,8 @@
           <a:cs typeface="+mn-cs"/>
         </a:defRPr>
       </a:lvl6pPr>
-      <a:lvl7pPr algn="l" defTabSz="342900" eaLnBrk="1" hangingPunct="1" latinLnBrk="0" marL="2057400" rtl="0">
-        <a:defRPr kern="1200" sz="1350">
+      <a:lvl7pPr marL="2057400" algn="l" defTabSz="342900" rtl="0" eaLnBrk="1" latinLnBrk="0" hangingPunct="1">
+        <a:defRPr sz="1350" kern="1200">
           <a:solidFill>
             <a:schemeClr val="tx1"/>
           </a:solidFill>
@@ -3052,8 +3052,8 @@
           <a:cs typeface="+mn-cs"/>
         </a:defRPr>
       </a:lvl7pPr>
-      <a:lvl8pPr algn="l" defTabSz="342900" eaLnBrk="1" hangingPunct="1" latinLnBrk="0" marL="2400300" rtl="0">
-        <a:defRPr kern="1200" sz="1350">
+      <a:lvl8pPr marL="2400300" algn="l" defTabSz="342900" rtl="0" eaLnBrk="1" latinLnBrk="0" hangingPunct="1">
+        <a:defRPr sz="1350" kern="1200">
           <a:solidFill>
             <a:schemeClr val="tx1"/>
           </a:solidFill>
@@ -3062,8 +3062,8 @@
           <a:cs typeface="+mn-cs"/>
         </a:defRPr>
       </a:lvl8pPr>
-      <a:lvl9pPr algn="l" defTabSz="342900" eaLnBrk="1" hangingPunct="1" latinLnBrk="0" marL="2743200" rtl="0">
-        <a:defRPr kern="1200" sz="1350">
+      <a:lvl9pPr marL="2743200" algn="l" defTabSz="342900" rtl="0" eaLnBrk="1" latinLnBrk="0" hangingPunct="1">
+        <a:defRPr sz="1350" kern="1200">
           <a:solidFill>
             <a:schemeClr val="tx1"/>
           </a:solidFill>
